--- a/Chapter 1 - Java&OOP/JavaOopBasics.pptx
+++ b/Chapter 1 - Java&OOP/JavaOopBasics.pptx
@@ -5,7 +5,7 @@
     <p:sldMasterId id="2147483648" r:id="rId1"/>
   </p:sldMasterIdLst>
   <p:notesMasterIdLst>
-    <p:notesMasterId r:id="rId22"/>
+    <p:notesMasterId r:id="rId21"/>
   </p:notesMasterIdLst>
   <p:sldIdLst>
     <p:sldId id="256" r:id="rId2"/>
@@ -27,17 +27,16 @@
     <p:sldId id="301" r:id="rId18"/>
     <p:sldId id="305" r:id="rId19"/>
     <p:sldId id="303" r:id="rId20"/>
-    <p:sldId id="283" r:id="rId21"/>
   </p:sldIdLst>
   <p:sldSz cx="9144000" cy="5143500" type="screen16x9"/>
   <p:notesSz cx="6858000" cy="9144000"/>
   <p:embeddedFontLst>
     <p:embeddedFont>
       <p:font typeface="Rubik" pitchFamily="2" charset="-79"/>
-      <p:regular r:id="rId23"/>
-      <p:bold r:id="rId24"/>
-      <p:italic r:id="rId25"/>
-      <p:boldItalic r:id="rId26"/>
+      <p:regular r:id="rId22"/>
+      <p:bold r:id="rId23"/>
+      <p:italic r:id="rId24"/>
+      <p:boldItalic r:id="rId25"/>
     </p:embeddedFont>
   </p:embeddedFontLst>
   <p:defaultTextStyle>
@@ -1915,10 +1914,9 @@
               <a:buNone/>
             </a:pPr>
             <a:r>
-              <a:rPr lang="he-IL" dirty="0"/>
-              <a:t>אפשרות אחרת היא לעשות כמה שלבים של ירושה</a:t>
+              <a:rPr lang="en-US" dirty="0"/>
+              <a:t>Another option is to create multiple levels of inheritance.</a:t>
             </a:r>
-            <a:endParaRPr dirty="0"/>
           </a:p>
         </p:txBody>
       </p:sp>
@@ -2176,49 +2174,30 @@
               <a:rPr lang="en-US" dirty="0"/>
               <a:t>Source: https://www.w3schools.com/java/java_oop.asp</a:t>
             </a:r>
-            <a:endParaRPr lang="he-IL" dirty="0"/>
           </a:p>
           <a:p>
-            <a:pPr marL="0" lvl="0" indent="0" algn="l" rtl="0">
-              <a:lnSpc>
-                <a:spcPct val="100000"/>
-              </a:lnSpc>
-              <a:spcBef>
-                <a:spcPts val="0"/>
-              </a:spcBef>
-              <a:spcAft>
-                <a:spcPts val="0"/>
-              </a:spcAft>
+            <a:pPr marL="0" marR="0" lvl="0" indent="0" algn="l" defTabSz="914400" rtl="0" eaLnBrk="1" fontAlgn="auto" latinLnBrk="0" hangingPunct="1">
+              <a:lnSpc>
+                <a:spcPct val="100000"/>
+              </a:lnSpc>
+              <a:spcBef>
+                <a:spcPts val="0"/>
+              </a:spcBef>
+              <a:spcAft>
+                <a:spcPts val="0"/>
+              </a:spcAft>
+              <a:buClr>
+                <a:srgbClr val="000000"/>
+              </a:buClr>
               <a:buSzPts val="1400"/>
-              <a:buNone/>
-            </a:pPr>
-            <a:r>
-              <a:rPr lang="he-IL" dirty="0"/>
-              <a:t>הבנאי משמש אותנו כאשר אנחנו רוצים ליצור </a:t>
-            </a:r>
-            <a:endParaRPr lang="en-US" dirty="0"/>
-          </a:p>
-          <a:p>
-            <a:pPr marL="0" lvl="0" indent="0" algn="l" rtl="0">
-              <a:lnSpc>
-                <a:spcPct val="100000"/>
-              </a:lnSpc>
-              <a:spcBef>
-                <a:spcPts val="0"/>
-              </a:spcBef>
-              <a:spcAft>
-                <a:spcPts val="0"/>
-              </a:spcAft>
-              <a:buSzPts val="1400"/>
-              <a:buNone/>
+              <a:buFont typeface="Arial"/>
+              <a:buNone/>
+              <a:tabLst/>
+              <a:defRPr/>
             </a:pPr>
             <a:r>
               <a:rPr lang="en-US" dirty="0"/>
-              <a:t>Instance</a:t>
-            </a:r>
-            <a:r>
-              <a:rPr lang="he-IL" dirty="0"/>
-              <a:t> </a:t>
+              <a:t>A constructor is used when we want to create a new instance of our class.</a:t>
             </a:r>
           </a:p>
           <a:p>
@@ -2235,10 +2214,7 @@
               <a:buSzPts val="1400"/>
               <a:buNone/>
             </a:pPr>
-            <a:r>
-              <a:rPr lang="he-IL" dirty="0"/>
-              <a:t>חדש של המחלקה שלנו.</a:t>
-            </a:r>
+            <a:endParaRPr lang="he-IL" dirty="0"/>
           </a:p>
         </p:txBody>
       </p:sp>
@@ -3177,53 +3153,6 @@
             </a:r>
             <a:endParaRPr lang="he-IL" dirty="0"/>
           </a:p>
-          <a:p>
-            <a:pPr marL="0" lvl="0" indent="0" algn="l" rtl="0">
-              <a:lnSpc>
-                <a:spcPct val="100000"/>
-              </a:lnSpc>
-              <a:spcBef>
-                <a:spcPts val="0"/>
-              </a:spcBef>
-              <a:spcAft>
-                <a:spcPts val="0"/>
-              </a:spcAft>
-              <a:buSzPts val="1400"/>
-              <a:buNone/>
-            </a:pPr>
-            <a:r>
-              <a:rPr lang="he-IL" dirty="0"/>
-              <a:t>נממש את הפקודה</a:t>
-            </a:r>
-            <a:br>
-              <a:rPr lang="en-US" dirty="0"/>
-            </a:br>
-            <a:r>
-              <a:rPr lang="en-US" dirty="0" err="1"/>
-              <a:t>AnimalSound</a:t>
-            </a:r>
-            <a:endParaRPr lang="he-IL" dirty="0"/>
-          </a:p>
-          <a:p>
-            <a:pPr marL="0" lvl="0" indent="0" algn="l" rtl="0">
-              <a:lnSpc>
-                <a:spcPct val="100000"/>
-              </a:lnSpc>
-              <a:spcBef>
-                <a:spcPts val="0"/>
-              </a:spcBef>
-              <a:spcAft>
-                <a:spcPts val="0"/>
-              </a:spcAft>
-              <a:buSzPts val="1400"/>
-              <a:buNone/>
-            </a:pPr>
-            <a:r>
-              <a:rPr lang="he-IL" dirty="0"/>
-              <a:t>בכמה מהחיות</a:t>
-            </a:r>
-            <a:endParaRPr dirty="0"/>
-          </a:p>
         </p:txBody>
       </p:sp>
       <p:sp>
@@ -3412,133 +3341,6 @@
 </p:notes>
 </file>
 
-<file path=ppt/notesSlides/notesSlide20.xml><?xml version="1.0" encoding="utf-8"?>
-<p:notes xmlns:a="http://schemas.openxmlformats.org/drawingml/2006/main" xmlns:r="http://schemas.openxmlformats.org/officeDocument/2006/relationships" xmlns:p="http://schemas.openxmlformats.org/presentationml/2006/main" showMasterSp="0" showMasterPhAnim="0">
-  <p:cSld>
-    <p:spTree>
-      <p:nvGrpSpPr>
-        <p:cNvPr id="1" name="Shape 98"/>
-        <p:cNvGrpSpPr/>
-        <p:nvPr/>
-      </p:nvGrpSpPr>
-      <p:grpSpPr>
-        <a:xfrm>
-          <a:off x="0" y="0"/>
-          <a:ext cx="0" cy="0"/>
-          <a:chOff x="0" y="0"/>
-          <a:chExt cx="0" cy="0"/>
-        </a:xfrm>
-      </p:grpSpPr>
-      <p:sp>
-        <p:nvSpPr>
-          <p:cNvPr id="99" name="Google Shape;99;g9605f3d7aa_0_91:notes"/>
-          <p:cNvSpPr txBox="1">
-            <a:spLocks noGrp="1"/>
-          </p:cNvSpPr>
-          <p:nvPr>
-            <p:ph type="body" idx="1"/>
-          </p:nvPr>
-        </p:nvSpPr>
-        <p:spPr>
-          <a:xfrm>
-            <a:off x="685800" y="4400550"/>
-            <a:ext cx="5486400" cy="3600600"/>
-          </a:xfrm>
-          <a:prstGeom prst="rect">
-            <a:avLst/>
-          </a:prstGeom>
-          <a:noFill/>
-          <a:ln>
-            <a:noFill/>
-          </a:ln>
-        </p:spPr>
-        <p:txBody>
-          <a:bodyPr spcFirstLastPara="1" wrap="square" lIns="91425" tIns="45700" rIns="91425" bIns="45700" anchor="t" anchorCtr="0">
-            <a:noAutofit/>
-          </a:bodyPr>
-          <a:lstStyle/>
-          <a:p>
-            <a:pPr marL="0" lvl="0" indent="0" algn="l" rtl="0">
-              <a:lnSpc>
-                <a:spcPct val="100000"/>
-              </a:lnSpc>
-              <a:spcBef>
-                <a:spcPts val="0"/>
-              </a:spcBef>
-              <a:spcAft>
-                <a:spcPts val="0"/>
-              </a:spcAft>
-              <a:buSzPts val="1400"/>
-              <a:buNone/>
-            </a:pPr>
-            <a:endParaRPr/>
-          </a:p>
-        </p:txBody>
-      </p:sp>
-      <p:sp>
-        <p:nvSpPr>
-          <p:cNvPr id="100" name="Google Shape;100;g9605f3d7aa_0_91:notes"/>
-          <p:cNvSpPr>
-            <a:spLocks noGrp="1" noRot="1" noChangeAspect="1"/>
-          </p:cNvSpPr>
-          <p:nvPr>
-            <p:ph type="sldImg" idx="2"/>
-          </p:nvPr>
-        </p:nvSpPr>
-        <p:spPr>
-          <a:xfrm>
-            <a:off x="685800" y="1143000"/>
-            <a:ext cx="5486400" cy="3086100"/>
-          </a:xfrm>
-          <a:custGeom>
-            <a:avLst/>
-            <a:gdLst/>
-            <a:ahLst/>
-            <a:cxnLst/>
-            <a:rect l="l" t="t" r="r" b="b"/>
-            <a:pathLst>
-              <a:path w="120000" h="120000" extrusionOk="0">
-                <a:moveTo>
-                  <a:pt x="0" y="0"/>
-                </a:moveTo>
-                <a:lnTo>
-                  <a:pt x="120000" y="0"/>
-                </a:lnTo>
-                <a:lnTo>
-                  <a:pt x="120000" y="120000"/>
-                </a:lnTo>
-                <a:lnTo>
-                  <a:pt x="0" y="120000"/>
-                </a:lnTo>
-                <a:close/>
-              </a:path>
-            </a:pathLst>
-          </a:custGeom>
-          <a:noFill/>
-          <a:ln w="12700" cap="flat" cmpd="sng">
-            <a:solidFill>
-              <a:srgbClr val="000000"/>
-            </a:solidFill>
-            <a:prstDash val="solid"/>
-            <a:round/>
-            <a:headEnd type="none" w="sm" len="sm"/>
-            <a:tailEnd type="none" w="sm" len="sm"/>
-          </a:ln>
-        </p:spPr>
-      </p:sp>
-    </p:spTree>
-    <p:extLst>
-      <p:ext uri="{BB962C8B-B14F-4D97-AF65-F5344CB8AC3E}">
-        <p14:creationId xmlns:p14="http://schemas.microsoft.com/office/powerpoint/2010/main" val="1664297704"/>
-      </p:ext>
-    </p:extLst>
-  </p:cSld>
-  <p:clrMapOvr>
-    <a:masterClrMapping/>
-  </p:clrMapOvr>
-</p:notes>
-</file>
-
 <file path=ppt/notesSlides/notesSlide3.xml><?xml version="1.0" encoding="utf-8"?>
 <p:notes xmlns:a="http://schemas.openxmlformats.org/drawingml/2006/main" xmlns:r="http://schemas.openxmlformats.org/officeDocument/2006/relationships" xmlns:p="http://schemas.openxmlformats.org/presentationml/2006/main" showMasterSp="0" showMasterPhAnim="0">
   <p:cSld>
@@ -3599,8 +3401,8 @@
               <a:buNone/>
             </a:pPr>
             <a:r>
-              <a:rPr lang="he-IL" dirty="0"/>
-              <a:t>נניח שאנחנו רוצים לעשות קטלוג של כל הכלבים בשכונה, לכל כלב יש במשותף מספר פרמטרים שמתארים אותו. לדוגמה: שם, גיל, סוג וכדומה</a:t>
+              <a:rPr lang="en-US" dirty="0"/>
+              <a:t>Let’s assume we want to create a catalog of all the dogs in a neighborhood. Each dog has several parameters in common that describe it, for example: name, age, type, and so on.</a:t>
             </a:r>
             <a:endParaRPr dirty="0"/>
           </a:p>
@@ -3725,32 +3527,8 @@
               <a:buNone/>
             </a:pPr>
             <a:r>
-              <a:rPr lang="he-IL" dirty="0"/>
-              <a:t>ניצור משהו שנראה קלס, סוג של "תבנית" לכל כלב שנרצה לייצג. כל פעם שרוצים ליצור כלב חדש נשתמש בתבנית שיצרנו ונגדיר את הפרמטרים הספציפיים לכלב שיצרנו דבר זה נקראה </a:t>
-            </a:r>
-            <a:r>
-              <a:rPr lang="he-IL" dirty="0" err="1"/>
-              <a:t>אינסטנציאציה</a:t>
-            </a:r>
-            <a:r>
-              <a:rPr lang="he-IL" dirty="0"/>
-              <a:t> וכל כלב שאנחנו מתארים הוא "</a:t>
-            </a:r>
-            <a:r>
-              <a:rPr lang="he-IL" dirty="0" err="1"/>
-              <a:t>אוביקט</a:t>
-            </a:r>
-            <a:r>
-              <a:rPr lang="he-IL" dirty="0"/>
-              <a:t>". עכשיו אנחנו יכולים לשמור מערך של  </a:t>
-            </a:r>
-            <a:r>
-              <a:rPr lang="he-IL" dirty="0" err="1"/>
-              <a:t>אוביקטים</a:t>
-            </a:r>
-            <a:r>
-              <a:rPr lang="he-IL" dirty="0"/>
-              <a:t> מסוג כלב.</a:t>
+              <a:rPr lang="en-US" dirty="0"/>
+              <a:t>We will create something called a class, a kind of “template” for every dog we want to represent. Each time we want to create a new dog, we will use the template we created and define the specific parameters for that dog. This process is called instantiation, and each dog we describe is an “object.” Now we can store an array of objects of type Dog.</a:t>
             </a:r>
             <a:endParaRPr dirty="0"/>
           </a:p>
@@ -3880,8 +3658,8 @@
               <a:buNone/>
             </a:pPr>
             <a:r>
-              <a:rPr lang="he-IL" dirty="0"/>
-              <a:t>נניח שאנחנו רוצים לעשות קטלוג של כל חתולים בשכונה, לכל חתול, בדיוק כמו לכלב לכל חתול יש במשותף מספר פרמטרים שמתארים אותו. לדוגמה: שם, גיל, סוג וכדומה</a:t>
+              <a:rPr lang="en-US" dirty="0"/>
+              <a:t>Now suppose we want to create a catalog of all the cats in the neighborhood. Each cat, just like each dog, has several shared parameters that describe it, for example: name, age, type, and so on.</a:t>
             </a:r>
             <a:endParaRPr dirty="0"/>
           </a:p>
@@ -4011,18 +3789,28 @@
               <a:buNone/>
             </a:pPr>
             <a:r>
-              <a:rPr lang="he-IL" dirty="0"/>
-              <a:t>נחזור בדיוק על אותם הצעדים, ניצור קלס מסוג חתול ואז ניצור מספר אובייקטים מסוג חתול בעזרת </a:t>
+              <a:rPr lang="en-US" dirty="0"/>
+              <a:t>We will repeat exactly the same steps: create a class of type Cat and then create several objects of type Cat using instantiation. </a:t>
             </a:r>
+          </a:p>
+          <a:p>
+            <a:pPr marL="0" lvl="0" indent="0" algn="l" rtl="0">
+              <a:lnSpc>
+                <a:spcPct val="100000"/>
+              </a:lnSpc>
+              <a:spcBef>
+                <a:spcPts val="0"/>
+              </a:spcBef>
+              <a:spcAft>
+                <a:spcPts val="0"/>
+              </a:spcAft>
+              <a:buSzPts val="1400"/>
+              <a:buNone/>
+            </a:pPr>
             <a:r>
-              <a:rPr lang="he-IL" dirty="0" err="1"/>
-              <a:t>אינסטנציאציה</a:t>
+              <a:rPr lang="en-US" dirty="0"/>
+              <a:t>If you notice, the only difference between the Dog class and the Cat class is that cats don’t go to parks but instead prefer a certain chair at home.</a:t>
             </a:r>
-            <a:r>
-              <a:rPr lang="he-IL" dirty="0"/>
-              <a:t>.</a:t>
-            </a:r>
-            <a:endParaRPr dirty="0"/>
           </a:p>
         </p:txBody>
       </p:sp>
@@ -4150,8 +3938,8 @@
               <a:buNone/>
             </a:pPr>
             <a:r>
-              <a:rPr lang="he-IL" dirty="0"/>
-              <a:t>אם שמתם לב הדבר היחיד ששונה אצל קלס הכלבים וקלס החתולים זה שחתולים לא הולכים לפארקים אלה אוהבים כיסא מסוים בבית</a:t>
+              <a:rPr lang="en-US" dirty="0"/>
+              <a:t>We will create something called a base class that contains the parameters shared by both cats and dogs. </a:t>
             </a:r>
           </a:p>
           <a:p>
@@ -4169,36 +3957,10 @@
               <a:buNone/>
             </a:pPr>
             <a:r>
-              <a:rPr lang="he-IL" dirty="0"/>
-              <a:t>אנחנו ניצור משהו שנקרא </a:t>
+              <a:rPr lang="en-US" dirty="0"/>
+              <a:t>The Cat class and the Dog class will inherit from our base class. This means that all the properties and methods found in the base class will also exist in the Cat class and the Dog class, in addition to specific properties found only in the Dog or Cat classes.</a:t>
             </a:r>
-            <a:r>
-              <a:rPr lang="he-IL" dirty="0" err="1"/>
-              <a:t>בייס</a:t>
-            </a:r>
-            <a:r>
-              <a:rPr lang="he-IL" dirty="0"/>
-              <a:t> קלס המכיל את הפרמטרים המשותפים לחתולים ולכלבים בתוכו.</a:t>
-            </a:r>
-          </a:p>
-          <a:p>
-            <a:pPr marL="0" lvl="0" indent="0" algn="l" rtl="0">
-              <a:lnSpc>
-                <a:spcPct val="100000"/>
-              </a:lnSpc>
-              <a:spcBef>
-                <a:spcPts val="0"/>
-              </a:spcBef>
-              <a:spcAft>
-                <a:spcPts val="0"/>
-              </a:spcAft>
-              <a:buSzPts val="1400"/>
-              <a:buNone/>
-            </a:pPr>
-            <a:r>
-              <a:rPr lang="he-IL" dirty="0"/>
-              <a:t>קלס החתול וקלס הכלב ירשו מהקלס הבסיסי שלנו, זאת אומרת שכל התכונות והפעולות שנמצאות בביס קלס נמצאות גם בקלס החתול ובקלס הכלב בנוסף לתכונות ספציפיות הנמצאות בקלס כלב וחתול.</a:t>
-            </a:r>
+            <a:endParaRPr lang="he-IL" dirty="0"/>
           </a:p>
         </p:txBody>
       </p:sp>
@@ -4453,16 +4215,8 @@
               <a:buNone/>
             </a:pPr>
             <a:r>
-              <a:rPr lang="he-IL" dirty="0"/>
-              <a:t>אפשרות אחת היא לעשות מה שעשינו עם הכלב והחתול, ליצור </a:t>
-            </a:r>
-            <a:r>
-              <a:rPr lang="he-IL" dirty="0" err="1"/>
-              <a:t>בייס</a:t>
-            </a:r>
-            <a:r>
-              <a:rPr lang="he-IL" dirty="0"/>
-              <a:t> קלס אחד שכולם יורשים ממנו</a:t>
+              <a:rPr lang="en-US" dirty="0"/>
+              <a:t>One option is to do what we did with dogs and cats: create a single base class that everything inherits from.</a:t>
             </a:r>
             <a:endParaRPr dirty="0"/>
           </a:p>
@@ -20010,18 +19764,11 @@
               <a:buNone/>
             </a:pPr>
             <a:r>
-              <a:rPr lang="he-IL" sz="1800" dirty="0">
-                <a:latin typeface="Rubik" panose="020B0604020202020204" charset="-79"/>
-                <a:cs typeface="Rubik" panose="020B0604020202020204" charset="-79"/>
-              </a:rPr>
-              <a:t>תכונות</a:t>
-            </a:r>
-            <a:r>
               <a:rPr lang="en-US" sz="1800" dirty="0">
                 <a:latin typeface="Rubik" panose="020B0604020202020204" charset="-79"/>
                 <a:cs typeface="Rubik" panose="020B0604020202020204" charset="-79"/>
               </a:rPr>
-              <a:t> - Properties</a:t>
+              <a:t>Properties</a:t>
             </a:r>
           </a:p>
         </p:txBody>
@@ -20059,18 +19806,11 @@
               <a:buNone/>
             </a:pPr>
             <a:r>
-              <a:rPr lang="he-IL" sz="1800" dirty="0">
-                <a:latin typeface="Rubik" panose="020B0604020202020204" charset="-79"/>
-                <a:cs typeface="Rubik" panose="020B0604020202020204" charset="-79"/>
-              </a:rPr>
-              <a:t>בנאי</a:t>
-            </a:r>
-            <a:r>
               <a:rPr lang="en-US" sz="1800" dirty="0">
                 <a:latin typeface="Rubik" panose="020B0604020202020204" charset="-79"/>
                 <a:cs typeface="Rubik" panose="020B0604020202020204" charset="-79"/>
               </a:rPr>
-              <a:t> - Contractor</a:t>
+              <a:t>Contractor</a:t>
             </a:r>
           </a:p>
         </p:txBody>
@@ -20108,18 +19848,11 @@
               <a:buNone/>
             </a:pPr>
             <a:r>
-              <a:rPr lang="he-IL" sz="1800" dirty="0">
-                <a:latin typeface="Rubik" panose="020B0604020202020204" charset="-79"/>
-                <a:cs typeface="Rubik" panose="020B0604020202020204" charset="-79"/>
-              </a:rPr>
-              <a:t>פעולות</a:t>
-            </a:r>
-            <a:r>
               <a:rPr lang="en-US" sz="1800" dirty="0">
                 <a:latin typeface="Rubik" panose="020B0604020202020204" charset="-79"/>
                 <a:cs typeface="Rubik" panose="020B0604020202020204" charset="-79"/>
               </a:rPr>
-              <a:t> - Functions</a:t>
+              <a:t>Functions</a:t>
             </a:r>
           </a:p>
         </p:txBody>
@@ -22392,7 +22125,7 @@
               <a:buNone/>
             </a:pPr>
             <a:r>
-              <a:rPr lang="he-IL" sz="3000" b="1" dirty="0">
+              <a:rPr lang="en-US" sz="3000" b="1" dirty="0">
                 <a:solidFill>
                   <a:srgbClr val="FFFFFF"/>
                 </a:solidFill>
@@ -22401,7 +22134,7 @@
                 <a:cs typeface="Rubik"/>
                 <a:sym typeface="Rubik"/>
               </a:rPr>
-              <a:t>ניצור קטלוג של גן חיות</a:t>
+              <a:t>Animals catalog</a:t>
             </a:r>
             <a:endParaRPr lang="he-IL" sz="3000" b="1" i="0" u="none" strike="noStrike" cap="none" dirty="0">
               <a:solidFill>
@@ -25255,394 +24988,6 @@
         </p:spPr>
       </p:pic>
     </p:spTree>
-  </p:cSld>
-  <p:clrMapOvr>
-    <a:masterClrMapping/>
-  </p:clrMapOvr>
-</p:sld>
-</file>
-
-<file path=ppt/slides/slide20.xml><?xml version="1.0" encoding="utf-8"?>
-<p:sld xmlns:a="http://schemas.openxmlformats.org/drawingml/2006/main" xmlns:r="http://schemas.openxmlformats.org/officeDocument/2006/relationships" xmlns:p="http://schemas.openxmlformats.org/presentationml/2006/main">
-  <p:cSld>
-    <p:spTree>
-      <p:nvGrpSpPr>
-        <p:cNvPr id="1" name="Shape 101"/>
-        <p:cNvGrpSpPr/>
-        <p:nvPr/>
-      </p:nvGrpSpPr>
-      <p:grpSpPr>
-        <a:xfrm>
-          <a:off x="0" y="0"/>
-          <a:ext cx="0" cy="0"/>
-          <a:chOff x="0" y="0"/>
-          <a:chExt cx="0" cy="0"/>
-        </a:xfrm>
-      </p:grpSpPr>
-      <p:grpSp>
-        <p:nvGrpSpPr>
-          <p:cNvPr id="12" name="Google Shape;89;p1">
-            <a:extLst>
-              <a:ext uri="{FF2B5EF4-FFF2-40B4-BE49-F238E27FC236}">
-                <a16:creationId xmlns:a16="http://schemas.microsoft.com/office/drawing/2014/main" id="{A7ADCE01-0604-AC2B-8A5F-F7BB47FC7A4C}"/>
-              </a:ext>
-            </a:extLst>
-          </p:cNvPr>
-          <p:cNvGrpSpPr/>
-          <p:nvPr/>
-        </p:nvGrpSpPr>
-        <p:grpSpPr>
-          <a:xfrm>
-            <a:off x="0" y="0"/>
-            <a:ext cx="9144000" cy="3183773"/>
-            <a:chOff x="0" y="-3301"/>
-            <a:chExt cx="12192000" cy="3840035"/>
-          </a:xfrm>
-        </p:grpSpPr>
-        <p:sp>
-          <p:nvSpPr>
-            <p:cNvPr id="13" name="Google Shape;90;p1">
-              <a:extLst>
-                <a:ext uri="{FF2B5EF4-FFF2-40B4-BE49-F238E27FC236}">
-                  <a16:creationId xmlns:a16="http://schemas.microsoft.com/office/drawing/2014/main" id="{197DB5CE-FCBF-8893-324E-AD37E651D7AA}"/>
-                </a:ext>
-              </a:extLst>
-            </p:cNvPr>
-            <p:cNvSpPr/>
-            <p:nvPr/>
-          </p:nvSpPr>
-          <p:spPr>
-            <a:xfrm>
-              <a:off x="0" y="-3301"/>
-              <a:ext cx="12192000" cy="3840035"/>
-            </a:xfrm>
-            <a:prstGeom prst="rect">
-              <a:avLst/>
-            </a:prstGeom>
-            <a:solidFill>
-              <a:srgbClr val="013471"/>
-            </a:solidFill>
-            <a:ln>
-              <a:noFill/>
-            </a:ln>
-          </p:spPr>
-          <p:txBody>
-            <a:bodyPr spcFirstLastPara="1" wrap="square" lIns="68575" tIns="34275" rIns="68575" bIns="34275" anchor="ctr" anchorCtr="0">
-              <a:noAutofit/>
-            </a:bodyPr>
-            <a:lstStyle/>
-            <a:p>
-              <a:pPr marL="0" marR="0" lvl="0" indent="0" algn="ctr" rtl="1">
-                <a:lnSpc>
-                  <a:spcPct val="100000"/>
-                </a:lnSpc>
-                <a:spcBef>
-                  <a:spcPts val="0"/>
-                </a:spcBef>
-                <a:spcAft>
-                  <a:spcPts val="0"/>
-                </a:spcAft>
-                <a:buClr>
-                  <a:srgbClr val="000000"/>
-                </a:buClr>
-                <a:buSzPts val="1400"/>
-                <a:buFont typeface="Arial"/>
-                <a:buNone/>
-              </a:pPr>
-              <a:endParaRPr sz="1400" b="0" i="0" u="none" strike="noStrike" cap="none" dirty="0">
-                <a:solidFill>
-                  <a:schemeClr val="lt1"/>
-                </a:solidFill>
-                <a:latin typeface="Calibri"/>
-                <a:ea typeface="Calibri"/>
-                <a:cs typeface="Calibri"/>
-                <a:sym typeface="Calibri"/>
-              </a:endParaRPr>
-            </a:p>
-          </p:txBody>
-        </p:sp>
-        <p:sp>
-          <p:nvSpPr>
-            <p:cNvPr id="14" name="Google Shape;91;p1">
-              <a:extLst>
-                <a:ext uri="{FF2B5EF4-FFF2-40B4-BE49-F238E27FC236}">
-                  <a16:creationId xmlns:a16="http://schemas.microsoft.com/office/drawing/2014/main" id="{A43190ED-CA31-8839-309D-FB9B63C3C90E}"/>
-                </a:ext>
-              </a:extLst>
-            </p:cNvPr>
-            <p:cNvSpPr/>
-            <p:nvPr/>
-          </p:nvSpPr>
-          <p:spPr>
-            <a:xfrm>
-              <a:off x="0" y="3590994"/>
-              <a:ext cx="12192000" cy="245122"/>
-            </a:xfrm>
-            <a:prstGeom prst="rect">
-              <a:avLst/>
-            </a:prstGeom>
-            <a:solidFill>
-              <a:schemeClr val="lt1">
-                <a:alpha val="72549"/>
-              </a:schemeClr>
-            </a:solidFill>
-            <a:ln>
-              <a:noFill/>
-            </a:ln>
-          </p:spPr>
-          <p:txBody>
-            <a:bodyPr spcFirstLastPara="1" wrap="square" lIns="68575" tIns="34275" rIns="68575" bIns="34275" anchor="ctr" anchorCtr="0">
-              <a:noAutofit/>
-            </a:bodyPr>
-            <a:lstStyle/>
-            <a:p>
-              <a:pPr marL="0" marR="0" lvl="0" indent="0" algn="ctr" rtl="1">
-                <a:lnSpc>
-                  <a:spcPct val="100000"/>
-                </a:lnSpc>
-                <a:spcBef>
-                  <a:spcPts val="0"/>
-                </a:spcBef>
-                <a:spcAft>
-                  <a:spcPts val="0"/>
-                </a:spcAft>
-                <a:buClr>
-                  <a:srgbClr val="000000"/>
-                </a:buClr>
-                <a:buSzPts val="1400"/>
-                <a:buFont typeface="Arial"/>
-                <a:buNone/>
-              </a:pPr>
-              <a:endParaRPr sz="1400" b="0" i="0" u="none" strike="noStrike" cap="none">
-                <a:solidFill>
-                  <a:schemeClr val="lt1"/>
-                </a:solidFill>
-                <a:latin typeface="Calibri"/>
-                <a:ea typeface="Calibri"/>
-                <a:cs typeface="Calibri"/>
-                <a:sym typeface="Calibri"/>
-              </a:endParaRPr>
-            </a:p>
-          </p:txBody>
-        </p:sp>
-        <p:sp>
-          <p:nvSpPr>
-            <p:cNvPr id="15" name="Google Shape;92;p1">
-              <a:extLst>
-                <a:ext uri="{FF2B5EF4-FFF2-40B4-BE49-F238E27FC236}">
-                  <a16:creationId xmlns:a16="http://schemas.microsoft.com/office/drawing/2014/main" id="{BF5406F8-2983-749B-C606-2DF4D2CD9CE3}"/>
-                </a:ext>
-              </a:extLst>
-            </p:cNvPr>
-            <p:cNvSpPr/>
-            <p:nvPr/>
-          </p:nvSpPr>
-          <p:spPr>
-            <a:xfrm>
-              <a:off x="0" y="3345872"/>
-              <a:ext cx="12192000" cy="245122"/>
-            </a:xfrm>
-            <a:prstGeom prst="rect">
-              <a:avLst/>
-            </a:prstGeom>
-            <a:solidFill>
-              <a:schemeClr val="lt1">
-                <a:alpha val="42352"/>
-              </a:schemeClr>
-            </a:solidFill>
-            <a:ln>
-              <a:noFill/>
-            </a:ln>
-          </p:spPr>
-          <p:txBody>
-            <a:bodyPr spcFirstLastPara="1" wrap="square" lIns="68575" tIns="34275" rIns="68575" bIns="34275" anchor="ctr" anchorCtr="0">
-              <a:noAutofit/>
-            </a:bodyPr>
-            <a:lstStyle/>
-            <a:p>
-              <a:pPr marL="0" marR="0" lvl="0" indent="0" algn="ctr" rtl="1">
-                <a:lnSpc>
-                  <a:spcPct val="100000"/>
-                </a:lnSpc>
-                <a:spcBef>
-                  <a:spcPts val="0"/>
-                </a:spcBef>
-                <a:spcAft>
-                  <a:spcPts val="0"/>
-                </a:spcAft>
-                <a:buClr>
-                  <a:srgbClr val="000000"/>
-                </a:buClr>
-                <a:buSzPts val="1400"/>
-                <a:buFont typeface="Arial"/>
-                <a:buNone/>
-              </a:pPr>
-              <a:endParaRPr sz="1400" b="0" i="0" u="none" strike="noStrike" cap="none">
-                <a:solidFill>
-                  <a:schemeClr val="lt1"/>
-                </a:solidFill>
-                <a:latin typeface="Calibri"/>
-                <a:ea typeface="Calibri"/>
-                <a:cs typeface="Calibri"/>
-                <a:sym typeface="Calibri"/>
-              </a:endParaRPr>
-            </a:p>
-          </p:txBody>
-        </p:sp>
-        <p:sp>
-          <p:nvSpPr>
-            <p:cNvPr id="16" name="Google Shape;93;p1">
-              <a:extLst>
-                <a:ext uri="{FF2B5EF4-FFF2-40B4-BE49-F238E27FC236}">
-                  <a16:creationId xmlns:a16="http://schemas.microsoft.com/office/drawing/2014/main" id="{BE61CB2D-6802-2600-98F4-F5F5F4757D89}"/>
-                </a:ext>
-              </a:extLst>
-            </p:cNvPr>
-            <p:cNvSpPr/>
-            <p:nvPr/>
-          </p:nvSpPr>
-          <p:spPr>
-            <a:xfrm>
-              <a:off x="0" y="3100133"/>
-              <a:ext cx="12192000" cy="245122"/>
-            </a:xfrm>
-            <a:prstGeom prst="rect">
-              <a:avLst/>
-            </a:prstGeom>
-            <a:solidFill>
-              <a:schemeClr val="lt1">
-                <a:alpha val="12549"/>
-              </a:schemeClr>
-            </a:solidFill>
-            <a:ln>
-              <a:noFill/>
-            </a:ln>
-          </p:spPr>
-          <p:txBody>
-            <a:bodyPr spcFirstLastPara="1" wrap="square" lIns="68575" tIns="34275" rIns="68575" bIns="34275" anchor="ctr" anchorCtr="0">
-              <a:noAutofit/>
-            </a:bodyPr>
-            <a:lstStyle/>
-            <a:p>
-              <a:pPr marL="0" marR="0" lvl="0" indent="0" algn="ctr" rtl="1">
-                <a:lnSpc>
-                  <a:spcPct val="100000"/>
-                </a:lnSpc>
-                <a:spcBef>
-                  <a:spcPts val="0"/>
-                </a:spcBef>
-                <a:spcAft>
-                  <a:spcPts val="0"/>
-                </a:spcAft>
-                <a:buClr>
-                  <a:srgbClr val="000000"/>
-                </a:buClr>
-                <a:buSzPts val="1400"/>
-                <a:buFont typeface="Arial"/>
-                <a:buNone/>
-              </a:pPr>
-              <a:endParaRPr sz="1400" b="0" i="0" u="none" strike="noStrike" cap="none">
-                <a:solidFill>
-                  <a:schemeClr val="lt1"/>
-                </a:solidFill>
-                <a:latin typeface="Calibri"/>
-                <a:ea typeface="Calibri"/>
-                <a:cs typeface="Calibri"/>
-                <a:sym typeface="Calibri"/>
-              </a:endParaRPr>
-            </a:p>
-          </p:txBody>
-        </p:sp>
-      </p:grpSp>
-      <p:sp>
-        <p:nvSpPr>
-          <p:cNvPr id="104" name="Google Shape;104;g9605f3d7aa_0_91"/>
-          <p:cNvSpPr txBox="1"/>
-          <p:nvPr/>
-        </p:nvSpPr>
-        <p:spPr>
-          <a:xfrm>
-            <a:off x="1158882" y="1299642"/>
-            <a:ext cx="6826235" cy="1476300"/>
-          </a:xfrm>
-          <a:prstGeom prst="rect">
-            <a:avLst/>
-          </a:prstGeom>
-          <a:noFill/>
-          <a:ln>
-            <a:noFill/>
-          </a:ln>
-        </p:spPr>
-        <p:txBody>
-          <a:bodyPr spcFirstLastPara="1" wrap="square" lIns="91425" tIns="91425" rIns="91425" bIns="91425" anchor="t" anchorCtr="0">
-            <a:noAutofit/>
-          </a:bodyPr>
-          <a:lstStyle/>
-          <a:p>
-            <a:pPr marL="0" lvl="0" indent="0" algn="ctr" rtl="1">
-              <a:spcBef>
-                <a:spcPts val="0"/>
-              </a:spcBef>
-              <a:spcAft>
-                <a:spcPts val="0"/>
-              </a:spcAft>
-              <a:buNone/>
-            </a:pPr>
-            <a:r>
-              <a:rPr lang="he-IL" sz="5400" b="1" dirty="0">
-                <a:solidFill>
-                  <a:schemeClr val="bg1"/>
-                </a:solidFill>
-              </a:rPr>
-              <a:t>תודה על ההקשבה</a:t>
-            </a:r>
-            <a:endParaRPr lang="iw-IL" sz="5400" b="1" dirty="0">
-              <a:solidFill>
-                <a:schemeClr val="bg1"/>
-              </a:solidFill>
-            </a:endParaRPr>
-          </a:p>
-        </p:txBody>
-      </p:sp>
-      <p:pic>
-        <p:nvPicPr>
-          <p:cNvPr id="3" name="Google Shape;88;p1">
-            <a:extLst>
-              <a:ext uri="{FF2B5EF4-FFF2-40B4-BE49-F238E27FC236}">
-                <a16:creationId xmlns:a16="http://schemas.microsoft.com/office/drawing/2014/main" id="{DFD4EF1C-EDD6-8CC1-6F1E-BF6356C4B7DB}"/>
-              </a:ext>
-            </a:extLst>
-          </p:cNvPr>
-          <p:cNvPicPr preferRelativeResize="0"/>
-          <p:nvPr/>
-        </p:nvPicPr>
-        <p:blipFill rotWithShape="1">
-          <a:blip r:embed="rId3">
-            <a:alphaModFix/>
-          </a:blip>
-          <a:srcRect/>
-          <a:stretch/>
-        </p:blipFill>
-        <p:spPr>
-          <a:xfrm>
-            <a:off x="3062190" y="3633734"/>
-            <a:ext cx="2992924" cy="831245"/>
-          </a:xfrm>
-          <a:prstGeom prst="rect">
-            <a:avLst/>
-          </a:prstGeom>
-          <a:noFill/>
-          <a:ln>
-            <a:noFill/>
-          </a:ln>
-        </p:spPr>
-      </p:pic>
-    </p:spTree>
-    <p:extLst>
-      <p:ext uri="{BB962C8B-B14F-4D97-AF65-F5344CB8AC3E}">
-        <p14:creationId xmlns:p14="http://schemas.microsoft.com/office/powerpoint/2010/main" val="3231784974"/>
-      </p:ext>
-    </p:extLst>
   </p:cSld>
   <p:clrMapOvr>
     <a:masterClrMapping/>
